--- a/assets/powerpoints/module-n3-vetements/E2-je-retiens-des-mots.pptx
+++ b/assets/powerpoints/module-n3-vetements/E2-je-retiens-des-mots.pptx
@@ -5045,7 +5045,7 @@
                 </a:solidFill>
                 <a:latin typeface="Verdana"/>
               </a:rPr>
-              <a:t>Sept panneaux « En apprendre plus », avec de l'audio. Ils restent accessibles après la fin du module.</a:t>
+              <a:t>Sept panneaux « Ouvrir la mini-leçon », avec de l'audio. Ils restent accessibles après la fin du module.</a:t>
             </a:r>
           </a:p>
         </p:txBody>
